--- a/SigPath-Pitch-2min.pptx
+++ b/SigPath-Pitch-2min.pptx
@@ -4025,7 +4025,7 @@
                 </a:solidFill>
                 <a:latin typeface="Plus Jakarta Sans"/>
               </a:rPr>
-              <a:t>502</a:t>
+              <a:t>525</a:t>
             </a:r>
           </a:p>
         </p:txBody>
